--- a/ppt/Grade09/ICSE9_Pressure_PartA_2_Pascal_and_Hydraulics.pptx
+++ b/ppt/Grade09/ICSE9_Pressure_PartA_2_Pascal_and_Hydraulics.pptx
@@ -26741,7 +26741,7 @@
       </p:sp>
       <p:pic>
         <p:nvPicPr>
-          <p:cNvPr id="6" name="Picture 5" descr="pr_fig_4_4.png"/>
+          <p:cNvPr id="6" name="Picture 5" descr="fig_4_4.png"/>
           <p:cNvPicPr>
             <a:picLocks noChangeAspect="1"/>
           </p:cNvPicPr>
@@ -35327,7 +35327,7 @@
       </p:sp>
       <p:pic>
         <p:nvPicPr>
-          <p:cNvPr id="6" name="Picture 5" descr="pr_fig_4_5.png"/>
+          <p:cNvPr id="6" name="Picture 5" descr="fig_4_5.png"/>
           <p:cNvPicPr>
             <a:picLocks noChangeAspect="1"/>
           </p:cNvPicPr>
